--- a/src/DocuChef.TestConsoleApp/files/ppt/template_2.pptx
+++ b/src/DocuChef.TestConsoleApp/files/ppt/template_2.pptx
@@ -198,7 +198,7 @@
           <a:p>
             <a:fld id="{67FA9472-1DC2-476D-847D-AEF869A08B54}" type="datetimeFigureOut">
               <a:rPr lang="ko-KR" altLang="en-US" smtClean="0"/>
-              <a:t>2025-05-10</a:t>
+              <a:t>2025-05-20</a:t>
             </a:fld>
             <a:endParaRPr lang="ko-KR" altLang="en-US"/>
           </a:p>
@@ -780,7 +780,7 @@
           <a:p>
             <a:fld id="{1BA27EB7-94DC-414F-A9E6-532764B50347}" type="datetimeFigureOut">
               <a:rPr lang="ko-KR" altLang="en-US" smtClean="0"/>
-              <a:t>2025-05-10</a:t>
+              <a:t>2025-05-20</a:t>
             </a:fld>
             <a:endParaRPr lang="ko-KR" altLang="en-US"/>
           </a:p>
@@ -978,7 +978,7 @@
           <a:p>
             <a:fld id="{1BA27EB7-94DC-414F-A9E6-532764B50347}" type="datetimeFigureOut">
               <a:rPr lang="ko-KR" altLang="en-US" smtClean="0"/>
-              <a:t>2025-05-10</a:t>
+              <a:t>2025-05-20</a:t>
             </a:fld>
             <a:endParaRPr lang="ko-KR" altLang="en-US"/>
           </a:p>
@@ -1186,7 +1186,7 @@
           <a:p>
             <a:fld id="{1BA27EB7-94DC-414F-A9E6-532764B50347}" type="datetimeFigureOut">
               <a:rPr lang="ko-KR" altLang="en-US" smtClean="0"/>
-              <a:t>2025-05-10</a:t>
+              <a:t>2025-05-20</a:t>
             </a:fld>
             <a:endParaRPr lang="ko-KR" altLang="en-US"/>
           </a:p>
@@ -1384,7 +1384,7 @@
           <a:p>
             <a:fld id="{1BA27EB7-94DC-414F-A9E6-532764B50347}" type="datetimeFigureOut">
               <a:rPr lang="ko-KR" altLang="en-US" smtClean="0"/>
-              <a:t>2025-05-10</a:t>
+              <a:t>2025-05-20</a:t>
             </a:fld>
             <a:endParaRPr lang="ko-KR" altLang="en-US"/>
           </a:p>
@@ -1659,7 +1659,7 @@
           <a:p>
             <a:fld id="{1BA27EB7-94DC-414F-A9E6-532764B50347}" type="datetimeFigureOut">
               <a:rPr lang="ko-KR" altLang="en-US" smtClean="0"/>
-              <a:t>2025-05-10</a:t>
+              <a:t>2025-05-20</a:t>
             </a:fld>
             <a:endParaRPr lang="ko-KR" altLang="en-US"/>
           </a:p>
@@ -1924,7 +1924,7 @@
           <a:p>
             <a:fld id="{1BA27EB7-94DC-414F-A9E6-532764B50347}" type="datetimeFigureOut">
               <a:rPr lang="ko-KR" altLang="en-US" smtClean="0"/>
-              <a:t>2025-05-10</a:t>
+              <a:t>2025-05-20</a:t>
             </a:fld>
             <a:endParaRPr lang="ko-KR" altLang="en-US"/>
           </a:p>
@@ -2336,7 +2336,7 @@
           <a:p>
             <a:fld id="{1BA27EB7-94DC-414F-A9E6-532764B50347}" type="datetimeFigureOut">
               <a:rPr lang="ko-KR" altLang="en-US" smtClean="0"/>
-              <a:t>2025-05-10</a:t>
+              <a:t>2025-05-20</a:t>
             </a:fld>
             <a:endParaRPr lang="ko-KR" altLang="en-US"/>
           </a:p>
@@ -2477,7 +2477,7 @@
           <a:p>
             <a:fld id="{1BA27EB7-94DC-414F-A9E6-532764B50347}" type="datetimeFigureOut">
               <a:rPr lang="ko-KR" altLang="en-US" smtClean="0"/>
-              <a:t>2025-05-10</a:t>
+              <a:t>2025-05-20</a:t>
             </a:fld>
             <a:endParaRPr lang="ko-KR" altLang="en-US"/>
           </a:p>
@@ -2590,7 +2590,7 @@
           <a:p>
             <a:fld id="{1BA27EB7-94DC-414F-A9E6-532764B50347}" type="datetimeFigureOut">
               <a:rPr lang="ko-KR" altLang="en-US" smtClean="0"/>
-              <a:t>2025-05-10</a:t>
+              <a:t>2025-05-20</a:t>
             </a:fld>
             <a:endParaRPr lang="ko-KR" altLang="en-US"/>
           </a:p>
@@ -2901,7 +2901,7 @@
           <a:p>
             <a:fld id="{1BA27EB7-94DC-414F-A9E6-532764B50347}" type="datetimeFigureOut">
               <a:rPr lang="ko-KR" altLang="en-US" smtClean="0"/>
-              <a:t>2025-05-10</a:t>
+              <a:t>2025-05-20</a:t>
             </a:fld>
             <a:endParaRPr lang="ko-KR" altLang="en-US"/>
           </a:p>
@@ -3189,7 +3189,7 @@
           <a:p>
             <a:fld id="{1BA27EB7-94DC-414F-A9E6-532764B50347}" type="datetimeFigureOut">
               <a:rPr lang="ko-KR" altLang="en-US" smtClean="0"/>
-              <a:t>2025-05-10</a:t>
+              <a:t>2025-05-20</a:t>
             </a:fld>
             <a:endParaRPr lang="ko-KR" altLang="en-US"/>
           </a:p>
@@ -3430,7 +3430,7 @@
           <a:p>
             <a:fld id="{1BA27EB7-94DC-414F-A9E6-532764B50347}" type="datetimeFigureOut">
               <a:rPr lang="ko-KR" altLang="en-US" smtClean="0"/>
-              <a:t>2025-05-10</a:t>
+              <a:t>2025-05-20</a:t>
             </a:fld>
             <a:endParaRPr lang="ko-KR" altLang="en-US"/>
           </a:p>
